--- a/docs/VERITAS_Prototype_Demonstration_Video_Deck.pptx
+++ b/docs/VERITAS_Prototype_Demonstration_Video_Deck.pptx
@@ -3255,7 +3255,7 @@
           <a:p>
             <a:pPr>
               <a:spcBef>
-                <a:spcPts val="1000"/>
+                <a:spcPts val="800"/>
               </a:spcBef>
               <a:defRPr sz="1200">
                 <a:solidFill>
@@ -3264,13 +3264,22 @@
               </a:defRPr>
             </a:pPr>
             <a:r>
-              <a:t>1. Open browser to https://veritas-ceg2.onrender.com (or localhost:8000).</a:t>
+              <a:t>1. Open browser to </a:t>
+            </a:r>
+            <a:r>
+              <a:rPr sz="1200" b="1" u="sng">
+                <a:solidFill>
+                  <a:srgbClr val="10B981"/>
+                </a:solidFill>
+                <a:hlinkClick r:id="rId2"/>
+              </a:rPr>
+              <a:t>https://veritas-ceg2.onrender.com</a:t>
             </a:r>
           </a:p>
           <a:p>
             <a:pPr>
               <a:spcBef>
-                <a:spcPts val="1000"/>
+                <a:spcPts val="800"/>
               </a:spcBef>
               <a:defRPr sz="1200">
                 <a:solidFill>
@@ -3285,7 +3294,7 @@
           <a:p>
             <a:pPr>
               <a:spcBef>
-                <a:spcPts val="1000"/>
+                <a:spcPts val="800"/>
               </a:spcBef>
               <a:defRPr sz="1200">
                 <a:solidFill>
@@ -3300,7 +3309,7 @@
           <a:p>
             <a:pPr>
               <a:spcBef>
-                <a:spcPts val="1000"/>
+                <a:spcPts val="800"/>
               </a:spcBef>
               <a:defRPr sz="1200">
                 <a:solidFill>
@@ -6267,7 +6276,7 @@
             <a:br/>
             <a:br/>
             <a:r>
-              <a:t>Thank you from Team Pinkies! You can explore our live application at https://veritas-ceg2.onrender.com or review the full source code on GitHub."</a:t>
+              <a:t>Thank you from Team Pinkies! You can explore our live application or review our full source code on GitHub."</a:t>
             </a:r>
           </a:p>
           <a:p>
@@ -6275,24 +6284,62 @@
             <a:pPr>
               <a:defRPr sz="1200">
                 <a:solidFill>
+                  <a:srgbClr val="94A3B8"/>
+                </a:solidFill>
+              </a:defRPr>
+            </a:pPr>
+            <a:r>
+              <a:t>🏆 Submission Details:</a:t>
+            </a:r>
+            <a:br/>
+            <a:r>
+              <a:t>• Team: Pinkies (Ananya Kastiya &amp; Osheen Dongre)</a:t>
+            </a:r>
+            <a:br/>
+            <a:r>
+              <a:t>• Track: Accenture Innovation Challenge Round 2</a:t>
+            </a:r>
+          </a:p>
+          <a:p>
+            <a:pPr>
+              <a:defRPr sz="1200" b="1">
+                <a:solidFill>
+                  <a:srgbClr val="F8FAFC"/>
+                </a:solidFill>
+              </a:defRPr>
+            </a:pPr>
+            <a:r>
+              <a:t>👉 Live Web App: </a:t>
+            </a:r>
+            <a:r>
+              <a:rPr sz="1200" b="1" u="sng">
+                <a:solidFill>
+                  <a:srgbClr val="10B981"/>
+                </a:solidFill>
+                <a:hlinkClick r:id="rId2"/>
+              </a:rPr>
+              <a:t>https://veritas-ceg2.onrender.com</a:t>
+            </a:r>
+          </a:p>
+          <a:p>
+            <a:pPr>
+              <a:defRPr sz="1200" b="1">
+                <a:solidFill>
+                  <a:srgbClr val="F8FAFC"/>
+                </a:solidFill>
+              </a:defRPr>
+            </a:pPr>
+            <a:r>
+              <a:t>👉 GitHub Repository: </a:t>
+            </a:r>
+            <a:r>
+              <a:rPr sz="1200" b="1" u="sng">
+                <a:solidFill>
                   <a:srgbClr val="6366F1"/>
                 </a:solidFill>
-              </a:defRPr>
-            </a:pPr>
-            <a:r>
-              <a:t>🏆 Submission Summary:</a:t>
-            </a:r>
-            <a:br/>
-            <a:r>
-              <a:t>• Team: Pinkies (Ananya Kastiya &amp; Osheen Dongre)</a:t>
-            </a:r>
-            <a:br/>
-            <a:r>
-              <a:t>• Live App: https://veritas-ceg2.onrender.com</a:t>
-            </a:r>
-            <a:br/>
-            <a:r>
-              <a:t>• GitHub: https://github.com/AnanyaKastiya/veritas-ecommerce-intelligence</a:t>
+                <a:hlinkClick r:id="rId3"/>
+              </a:rPr>
+              <a:t>https://github.com/AnanyaKastiya/veritas-ecommerce-intelligence</a:t>
             </a:r>
           </a:p>
         </p:txBody>
